--- a/Day/Day8/CSS Transitions, Transform, Animations, variables.pptx
+++ b/Day/Day8/CSS Transitions, Transform, Animations, variables.pptx
@@ -5568,15 +5568,7 @@
           <a:p>
             <a:r>
               <a:rPr lang="en-US" dirty="0"/>
-              <a:t>Common shorthand</a:t>
-            </a:r>
-            <a:r>
-              <a:rPr lang="en-US"/>
-              <a:t>: transition</a:t>
-            </a:r>
-            <a:r>
-              <a:rPr lang="en-US" dirty="0"/>
-              <a:t>: background-color 0.3s ease;</a:t>
+              <a:t>Common shorthand: transition: background-color 0.3s ease;</a:t>
             </a:r>
           </a:p>
         </p:txBody>
@@ -5938,15 +5930,7 @@
           <a:p>
             <a:r>
               <a:rPr lang="en-IN" dirty="0"/>
-              <a:t>Example: </a:t>
-            </a:r>
-            <a:r>
-              <a:rPr lang="en-IN" dirty="0" err="1"/>
-              <a:t>css.box</a:t>
-            </a:r>
-            <a:r>
-              <a:rPr lang="en-IN" dirty="0"/>
-              <a:t> {  transform: </a:t>
+              <a:t>Example: .box {  transform: </a:t>
             </a:r>
             <a:r>
               <a:rPr lang="en-IN" dirty="0" err="1"/>
